--- a/demo/Plateau-jury-deck.pptx
+++ b/demo/Plateau-jury-deck.pptx
@@ -20,6 +20,7 @@
     <p:sldId id="268" r:id="rId19"/>
     <p:sldId id="269" r:id="rId20"/>
     <p:sldId id="270" r:id="rId21"/>
+    <p:sldId id="271" r:id="rId22"/>
   </p:sldIdLst>
   <p:sldSz cx="12191695" cy="6858000" type="screen4x3"/>
   <p:notesSz cx="6858000" cy="9144000"/>
@@ -3381,7 +3382,7 @@
                 </a:solidFill>
                 <a:latin typeface="Consolas"/>
               </a:rPr>
-              <a:t>Working, measured on two laptops</a:t>
+              <a:t>Measured on 148 real agent traces</a:t>
             </a:r>
           </a:p>
           <a:p>
@@ -3397,7 +3398,7 @@
                 </a:solidFill>
                 <a:latin typeface="Consolas"/>
               </a:rPr>
-              <a:t>137 tests  ·  runs fully offline</a:t>
+              <a:t>165 tests  ·  runs fully offline</a:t>
             </a:r>
           </a:p>
         </p:txBody>
@@ -6771,7 +6772,7 @@
                 </a:solidFill>
                 <a:latin typeface="Arial Narrow"/>
               </a:rPr>
-              <a:t>WHERE IT STANDS</a:t>
+              <a:t>WHERE IT FAILS</a:t>
             </a:r>
           </a:p>
         </p:txBody>
@@ -6810,7 +6811,7 @@
                 </a:solidFill>
                 <a:latin typeface="Arial Narrow"/>
               </a:rPr>
-              <a:t>Built, measured, and running today.</a:t>
+              <a:t>148 real agent traces. We got worse.</a:t>
             </a:r>
           </a:p>
         </p:txBody>
@@ -6859,27 +6860,556 @@
           </a:p>
         </p:txBody>
       </p:sp>
-      <p:sp>
-        <p:nvSpPr>
-          <p:cNvPr id="5" name="Rectangle 4"/>
+      <p:graphicFrame>
+        <p:nvGraphicFramePr>
+          <p:cNvPr id="5" name="Table 4"/>
+          <p:cNvGraphicFramePr>
+            <a:graphicFrameLocks noGrp="1"/>
+          </p:cNvGraphicFramePr>
+          <p:nvPr/>
+        </p:nvGraphicFramePr>
+        <p:xfrm>
+          <a:off x="658368" y="1636776"/>
+          <a:ext cx="10874957" cy="2304288"/>
+        </p:xfrm>
+        <a:graphic>
+          <a:graphicData uri="http://schemas.openxmlformats.org/drawingml/2006/table">
+            <a:tbl>
+              <a:tblPr firstRow="1" bandRow="1">
+                <a:tableStyleId>{5C22544A-7EE6-4342-B048-85BDC9FD1C3A}</a:tableStyleId>
+              </a:tblPr>
+              <a:tblGrid>
+                <a:gridCol w="5437479"/>
+                <a:gridCol w="2718739"/>
+                <a:gridCol w="2718739"/>
+              </a:tblGrid>
+              <a:tr h="384048">
+                <a:tc>
+                  <a:txBody>
+                    <a:bodyPr wrap="square"/>
+                    <a:lstStyle/>
+                    <a:p>
+                      <a:pPr algn="l"/>
+                      <a:r>
+                        <a:rPr sz="1250" b="1">
+                          <a:solidFill>
+                            <a:srgbClr val="E6E3DA"/>
+                          </a:solidFill>
+                          <a:latin typeface="Arial Narrow"/>
+                        </a:rPr>
+                        <a:t>Detector</a:t>
+                      </a:r>
+                    </a:p>
+                  </a:txBody>
+                  <a:tcPr marL="109728" marR="109728" marT="45720" marB="45720">
+                    <a:solidFill>
+                      <a:srgbClr val="1C1B18"/>
+                    </a:solidFill>
+                  </a:tcPr>
+                </a:tc>
+                <a:tc>
+                  <a:txBody>
+                    <a:bodyPr wrap="square"/>
+                    <a:lstStyle/>
+                    <a:p>
+                      <a:pPr algn="l"/>
+                      <a:r>
+                        <a:rPr sz="1250" b="1">
+                          <a:solidFill>
+                            <a:srgbClr val="E6E3DA"/>
+                          </a:solidFill>
+                          <a:latin typeface="Arial Narrow"/>
+                        </a:rPr>
+                        <a:t>Recall</a:t>
+                      </a:r>
+                    </a:p>
+                  </a:txBody>
+                  <a:tcPr marL="109728" marR="109728" marT="45720" marB="45720">
+                    <a:solidFill>
+                      <a:srgbClr val="1C1B18"/>
+                    </a:solidFill>
+                  </a:tcPr>
+                </a:tc>
+                <a:tc>
+                  <a:txBody>
+                    <a:bodyPr wrap="square"/>
+                    <a:lstStyle/>
+                    <a:p>
+                      <a:pPr algn="l"/>
+                      <a:r>
+                        <a:rPr sz="1250" b="1">
+                          <a:solidFill>
+                            <a:srgbClr val="E6E3DA"/>
+                          </a:solidFill>
+                          <a:latin typeface="Arial Narrow"/>
+                        </a:rPr>
+                        <a:t>False-trip</a:t>
+                      </a:r>
+                    </a:p>
+                  </a:txBody>
+                  <a:tcPr marL="109728" marR="109728" marT="45720" marB="45720">
+                    <a:solidFill>
+                      <a:srgbClr val="1C1B18"/>
+                    </a:solidFill>
+                  </a:tcPr>
+                </a:tc>
+              </a:tr>
+              <a:tr h="384048">
+                <a:tc>
+                  <a:txBody>
+                    <a:bodyPr wrap="square"/>
+                    <a:lstStyle/>
+                    <a:p>
+                      <a:pPr algn="l"/>
+                      <a:r>
+                        <a:rPr sz="1250" b="1">
+                          <a:solidFill>
+                            <a:srgbClr val="1C1B18"/>
+                          </a:solidFill>
+                          <a:latin typeface="Arial Narrow"/>
+                        </a:rPr>
+                        <a:t>Plateau</a:t>
+                      </a:r>
+                    </a:p>
+                  </a:txBody>
+                  <a:tcPr marL="109728" marR="109728" marT="45720" marB="45720">
+                    <a:solidFill>
+                      <a:srgbClr val="DCD7C9"/>
+                    </a:solidFill>
+                  </a:tcPr>
+                </a:tc>
+                <a:tc>
+                  <a:txBody>
+                    <a:bodyPr wrap="square"/>
+                    <a:lstStyle/>
+                    <a:p>
+                      <a:pPr algn="r"/>
+                      <a:r>
+                        <a:rPr sz="1250" b="1">
+                          <a:solidFill>
+                            <a:srgbClr val="1C1B18"/>
+                          </a:solidFill>
+                          <a:latin typeface="Consolas"/>
+                        </a:rPr>
+                        <a:t>0.63</a:t>
+                      </a:r>
+                    </a:p>
+                  </a:txBody>
+                  <a:tcPr marL="109728" marR="109728" marT="45720" marB="45720">
+                    <a:solidFill>
+                      <a:srgbClr val="DCD7C9"/>
+                    </a:solidFill>
+                  </a:tcPr>
+                </a:tc>
+                <a:tc>
+                  <a:txBody>
+                    <a:bodyPr wrap="square"/>
+                    <a:lstStyle/>
+                    <a:p>
+                      <a:pPr algn="r"/>
+                      <a:r>
+                        <a:rPr sz="1250" b="1">
+                          <a:solidFill>
+                            <a:srgbClr val="B3221B"/>
+                          </a:solidFill>
+                          <a:latin typeface="Consolas"/>
+                        </a:rPr>
+                        <a:t>0.54</a:t>
+                      </a:r>
+                    </a:p>
+                  </a:txBody>
+                  <a:tcPr marL="109728" marR="109728" marT="45720" marB="45720">
+                    <a:solidFill>
+                      <a:srgbClr val="DCD7C9"/>
+                    </a:solidFill>
+                  </a:tcPr>
+                </a:tc>
+              </a:tr>
+              <a:tr h="384048">
+                <a:tc>
+                  <a:txBody>
+                    <a:bodyPr wrap="square"/>
+                    <a:lstStyle/>
+                    <a:p>
+                      <a:pPr algn="l"/>
+                      <a:r>
+                        <a:rPr sz="1250" b="0">
+                          <a:solidFill>
+                            <a:srgbClr val="1C1B18"/>
+                          </a:solidFill>
+                          <a:latin typeface="Arial Narrow"/>
+                        </a:rPr>
+                        <a:t>exact-args debounce</a:t>
+                      </a:r>
+                    </a:p>
+                  </a:txBody>
+                  <a:tcPr marL="109728" marR="109728" marT="45720" marB="45720">
+                    <a:solidFill>
+                      <a:srgbClr val="E6E3DA"/>
+                    </a:solidFill>
+                  </a:tcPr>
+                </a:tc>
+                <a:tc>
+                  <a:txBody>
+                    <a:bodyPr wrap="square"/>
+                    <a:lstStyle/>
+                    <a:p>
+                      <a:pPr algn="r"/>
+                      <a:r>
+                        <a:rPr sz="1250" b="0">
+                          <a:solidFill>
+                            <a:srgbClr val="1C1B18"/>
+                          </a:solidFill>
+                          <a:latin typeface="Consolas"/>
+                        </a:rPr>
+                        <a:t>0.58</a:t>
+                      </a:r>
+                    </a:p>
+                  </a:txBody>
+                  <a:tcPr marL="109728" marR="109728" marT="45720" marB="45720">
+                    <a:solidFill>
+                      <a:srgbClr val="E6E3DA"/>
+                    </a:solidFill>
+                  </a:tcPr>
+                </a:tc>
+                <a:tc>
+                  <a:txBody>
+                    <a:bodyPr wrap="square"/>
+                    <a:lstStyle/>
+                    <a:p>
+                      <a:pPr algn="r"/>
+                      <a:r>
+                        <a:rPr sz="1250" b="0">
+                          <a:solidFill>
+                            <a:srgbClr val="1C1B18"/>
+                          </a:solidFill>
+                          <a:latin typeface="Consolas"/>
+                        </a:rPr>
+                        <a:t>0.23</a:t>
+                      </a:r>
+                    </a:p>
+                  </a:txBody>
+                  <a:tcPr marL="109728" marR="109728" marT="45720" marB="45720">
+                    <a:solidFill>
+                      <a:srgbClr val="E6E3DA"/>
+                    </a:solidFill>
+                  </a:tcPr>
+                </a:tc>
+              </a:tr>
+              <a:tr h="384048">
+                <a:tc>
+                  <a:txBody>
+                    <a:bodyPr wrap="square"/>
+                    <a:lstStyle/>
+                    <a:p>
+                      <a:pPr algn="l"/>
+                      <a:r>
+                        <a:rPr sz="1250" b="0">
+                          <a:solidFill>
+                            <a:srgbClr val="1C1B18"/>
+                          </a:solidFill>
+                          <a:latin typeface="Arial Narrow"/>
+                        </a:rPr>
+                        <a:t>lexical (agent-loop-detector)</a:t>
+                      </a:r>
+                    </a:p>
+                  </a:txBody>
+                  <a:tcPr marL="109728" marR="109728" marT="45720" marB="45720">
+                    <a:solidFill>
+                      <a:srgbClr val="DCD7C9"/>
+                    </a:solidFill>
+                  </a:tcPr>
+                </a:tc>
+                <a:tc>
+                  <a:txBody>
+                    <a:bodyPr wrap="square"/>
+                    <a:lstStyle/>
+                    <a:p>
+                      <a:pPr algn="r"/>
+                      <a:r>
+                        <a:rPr sz="1250" b="0">
+                          <a:solidFill>
+                            <a:srgbClr val="1C1B18"/>
+                          </a:solidFill>
+                          <a:latin typeface="Consolas"/>
+                        </a:rPr>
+                        <a:t>0.07</a:t>
+                      </a:r>
+                    </a:p>
+                  </a:txBody>
+                  <a:tcPr marL="109728" marR="109728" marT="45720" marB="45720">
+                    <a:solidFill>
+                      <a:srgbClr val="DCD7C9"/>
+                    </a:solidFill>
+                  </a:tcPr>
+                </a:tc>
+                <a:tc>
+                  <a:txBody>
+                    <a:bodyPr wrap="square"/>
+                    <a:lstStyle/>
+                    <a:p>
+                      <a:pPr algn="r"/>
+                      <a:r>
+                        <a:rPr sz="1250" b="0">
+                          <a:solidFill>
+                            <a:srgbClr val="1C1B18"/>
+                          </a:solidFill>
+                          <a:latin typeface="Consolas"/>
+                        </a:rPr>
+                        <a:t>0.00</a:t>
+                      </a:r>
+                    </a:p>
+                  </a:txBody>
+                  <a:tcPr marL="109728" marR="109728" marT="45720" marB="45720">
+                    <a:solidFill>
+                      <a:srgbClr val="DCD7C9"/>
+                    </a:solidFill>
+                  </a:tcPr>
+                </a:tc>
+              </a:tr>
+              <a:tr h="384048">
+                <a:tc>
+                  <a:txBody>
+                    <a:bodyPr wrap="square"/>
+                    <a:lstStyle/>
+                    <a:p>
+                      <a:pPr algn="l"/>
+                      <a:r>
+                        <a:rPr sz="1250" b="0">
+                          <a:solidFill>
+                            <a:srgbClr val="1C1B18"/>
+                          </a:solidFill>
+                          <a:latin typeface="Arial Narrow"/>
+                        </a:rPr>
+                        <a:t>step-cap (LangGraph 25)</a:t>
+                      </a:r>
+                    </a:p>
+                  </a:txBody>
+                  <a:tcPr marL="109728" marR="109728" marT="45720" marB="45720">
+                    <a:solidFill>
+                      <a:srgbClr val="E6E3DA"/>
+                    </a:solidFill>
+                  </a:tcPr>
+                </a:tc>
+                <a:tc>
+                  <a:txBody>
+                    <a:bodyPr wrap="square"/>
+                    <a:lstStyle/>
+                    <a:p>
+                      <a:pPr algn="r"/>
+                      <a:r>
+                        <a:rPr sz="1250" b="0">
+                          <a:solidFill>
+                            <a:srgbClr val="1C1B18"/>
+                          </a:solidFill>
+                          <a:latin typeface="Consolas"/>
+                        </a:rPr>
+                        <a:t>0.12</a:t>
+                      </a:r>
+                    </a:p>
+                  </a:txBody>
+                  <a:tcPr marL="109728" marR="109728" marT="45720" marB="45720">
+                    <a:solidFill>
+                      <a:srgbClr val="E6E3DA"/>
+                    </a:solidFill>
+                  </a:tcPr>
+                </a:tc>
+                <a:tc>
+                  <a:txBody>
+                    <a:bodyPr wrap="square"/>
+                    <a:lstStyle/>
+                    <a:p>
+                      <a:pPr algn="r"/>
+                      <a:r>
+                        <a:rPr sz="1250" b="0">
+                          <a:solidFill>
+                            <a:srgbClr val="1C1B18"/>
+                          </a:solidFill>
+                          <a:latin typeface="Consolas"/>
+                        </a:rPr>
+                        <a:t>0.00</a:t>
+                      </a:r>
+                    </a:p>
+                  </a:txBody>
+                  <a:tcPr marL="109728" marR="109728" marT="45720" marB="45720">
+                    <a:solidFill>
+                      <a:srgbClr val="E6E3DA"/>
+                    </a:solidFill>
+                  </a:tcPr>
+                </a:tc>
+              </a:tr>
+              <a:tr h="384048">
+                <a:tc>
+                  <a:txBody>
+                    <a:bodyPr wrap="square"/>
+                    <a:lstStyle/>
+                    <a:p>
+                      <a:pPr algn="l"/>
+                      <a:r>
+                        <a:rPr sz="1250" b="0">
+                          <a:solidFill>
+                            <a:srgbClr val="1C1B18"/>
+                          </a:solidFill>
+                          <a:latin typeface="Arial Narrow"/>
+                        </a:rPr>
+                        <a:t>exact-match (OpenHands)</a:t>
+                      </a:r>
+                    </a:p>
+                  </a:txBody>
+                  <a:tcPr marL="109728" marR="109728" marT="45720" marB="45720">
+                    <a:solidFill>
+                      <a:srgbClr val="DCD7C9"/>
+                    </a:solidFill>
+                  </a:tcPr>
+                </a:tc>
+                <a:tc>
+                  <a:txBody>
+                    <a:bodyPr wrap="square"/>
+                    <a:lstStyle/>
+                    <a:p>
+                      <a:pPr algn="r"/>
+                      <a:r>
+                        <a:rPr sz="1250" b="0">
+                          <a:solidFill>
+                            <a:srgbClr val="1C1B18"/>
+                          </a:solidFill>
+                          <a:latin typeface="Consolas"/>
+                        </a:rPr>
+                        <a:t>0.00</a:t>
+                      </a:r>
+                    </a:p>
+                  </a:txBody>
+                  <a:tcPr marL="109728" marR="109728" marT="45720" marB="45720">
+                    <a:solidFill>
+                      <a:srgbClr val="DCD7C9"/>
+                    </a:solidFill>
+                  </a:tcPr>
+                </a:tc>
+                <a:tc>
+                  <a:txBody>
+                    <a:bodyPr wrap="square"/>
+                    <a:lstStyle/>
+                    <a:p>
+                      <a:pPr algn="r"/>
+                      <a:r>
+                        <a:rPr sz="1250" b="0">
+                          <a:solidFill>
+                            <a:srgbClr val="1C1B18"/>
+                          </a:solidFill>
+                          <a:latin typeface="Consolas"/>
+                        </a:rPr>
+                        <a:t>0.00</a:t>
+                      </a:r>
+                    </a:p>
+                  </a:txBody>
+                  <a:tcPr marL="109728" marR="109728" marT="45720" marB="45720">
+                    <a:solidFill>
+                      <a:srgbClr val="DCD7C9"/>
+                    </a:solidFill>
+                  </a:tcPr>
+                </a:tc>
+              </a:tr>
+            </a:tbl>
+          </a:graphicData>
+        </a:graphic>
+      </p:graphicFrame>
+      <p:sp>
+        <p:nvSpPr>
+          <p:cNvPr id="6" name="TextBox 5"/>
+          <p:cNvSpPr txBox="1"/>
+          <p:nvPr/>
+        </p:nvSpPr>
+        <p:spPr>
+          <a:xfrm>
+            <a:off x="658368" y="4133088"/>
+            <a:ext cx="1737360" cy="182880"/>
+          </a:xfrm>
+          <a:prstGeom prst="rect">
+            <a:avLst/>
+          </a:prstGeom>
+          <a:noFill/>
+        </p:spPr>
+        <p:txBody>
+          <a:bodyPr wrap="square" lIns="0" rIns="0" tIns="0" bIns="0">
+            <a:spAutoFit/>
+          </a:bodyPr>
+          <a:lstStyle/>
+          <a:p>
+            <a:pPr algn="l">
+              <a:lnSpc>
+                <a:spcPct val="125000"/>
+              </a:lnSpc>
+            </a:pPr>
+            <a:r>
+              <a:rPr sz="900" b="1" spc="126">
+                <a:solidFill>
+                  <a:srgbClr val="1C1B18"/>
+                </a:solidFill>
+                <a:latin typeface="Arial Narrow"/>
+              </a:rPr>
+              <a:t>MEASURED</a:t>
+            </a:r>
+          </a:p>
+        </p:txBody>
+      </p:sp>
+      <p:sp>
+        <p:nvSpPr>
+          <p:cNvPr id="7" name="TextBox 6"/>
+          <p:cNvSpPr txBox="1"/>
+          <p:nvPr/>
+        </p:nvSpPr>
+        <p:spPr>
+          <a:xfrm>
+            <a:off x="658368" y="4352544"/>
+            <a:ext cx="10874959" cy="548640"/>
+          </a:xfrm>
+          <a:prstGeom prst="rect">
+            <a:avLst/>
+          </a:prstGeom>
+          <a:noFill/>
+        </p:spPr>
+        <p:txBody>
+          <a:bodyPr wrap="square" lIns="0" rIns="0" tIns="0" bIns="0">
+            <a:spAutoFit/>
+          </a:bodyPr>
+          <a:lstStyle/>
+          <a:p>
+            <a:pPr algn="l">
+              <a:lnSpc>
+                <a:spcPct val="135000"/>
+              </a:lnSpc>
+            </a:pPr>
+            <a:r>
+              <a:rPr sz="1200" b="0">
+                <a:solidFill>
+                  <a:srgbClr val="6E695C"/>
+                </a:solidFill>
+                <a:latin typeface="Arial Narrow"/>
+              </a:rPr>
+              <a:t>TRAIL (PatronusAI, arXiv:2505.08638) — 148 expert-annotated traces from GAIA and SWE-Bench. On traces we wrote ourselves we hit recall 1.00 with zero false trips. On real ones we false-trip more than half the healthy runs, and NOTHING tested reaches 1.00/0.00. Our own evaluation was optimistic about us. We only know that because we went and got real traces.</a:t>
+            </a:r>
+          </a:p>
+        </p:txBody>
+      </p:sp>
+      <p:sp>
+        <p:nvSpPr>
+          <p:cNvPr id="8" name="Rectangle 7"/>
           <p:cNvSpPr/>
           <p:nvPr/>
         </p:nvSpPr>
         <p:spPr>
           <a:xfrm>
-            <a:off x="658368" y="1682496"/>
-            <a:ext cx="2615184" cy="1170432"/>
+            <a:off x="658368" y="5111496"/>
+            <a:ext cx="10874959" cy="12700"/>
           </a:xfrm>
           <a:prstGeom prst="rect">
             <a:avLst/>
           </a:prstGeom>
           <a:solidFill>
-            <a:srgbClr val="DCD7C9"/>
+            <a:srgbClr val="1C1B18"/>
           </a:solidFill>
-          <a:ln w="9525">
-            <a:solidFill>
-              <a:srgbClr val="1C1B18"/>
-            </a:solidFill>
+          <a:ln>
+            <a:noFill/>
           </a:ln>
           <a:effectLst/>
         </p:spPr>
@@ -6907,14 +7437,14 @@
       </p:sp>
       <p:sp>
         <p:nvSpPr>
-          <p:cNvPr id="6" name="TextBox 5"/>
+          <p:cNvPr id="9" name="TextBox 8"/>
           <p:cNvSpPr txBox="1"/>
           <p:nvPr/>
         </p:nvSpPr>
         <p:spPr>
           <a:xfrm>
-            <a:off x="804672" y="1810512"/>
-            <a:ext cx="2340864" cy="182880"/>
+            <a:off x="658368" y="5294376"/>
+            <a:ext cx="10874959" cy="548640"/>
           </a:xfrm>
           <a:prstGeom prst="rect">
             <a:avLst/>
@@ -6933,27 +7463,53 @@
               </a:lnSpc>
             </a:pPr>
             <a:r>
-              <a:rPr sz="1050" b="0" spc="147">
-                <a:solidFill>
-                  <a:srgbClr val="6E695C"/>
+              <a:rPr sz="1900" b="1">
+                <a:solidFill>
+                  <a:srgbClr val="1C1B18"/>
                 </a:solidFill>
                 <a:latin typeface="Arial Narrow"/>
               </a:rPr>
-              <a:t>TESTS PASSING</a:t>
-            </a:r>
-          </a:p>
-        </p:txBody>
-      </p:sp>
-      <p:sp>
-        <p:nvSpPr>
-          <p:cNvPr id="7" name="TextBox 6"/>
+              <a:t>Highest recall of anything that fires. A 0.00 false-trip rate is easy when you never trip.</a:t>
+            </a:r>
+          </a:p>
+        </p:txBody>
+      </p:sp>
+    </p:spTree>
+  </p:cSld>
+  <p:clrMapOvr>
+    <a:masterClrMapping/>
+  </p:clrMapOvr>
+</p:sld>
+</file>
+
+<file path=ppt/slides/slide16.xml><?xml version="1.0" encoding="utf-8"?>
+<p:sld xmlns:a="http://schemas.openxmlformats.org/drawingml/2006/main" xmlns:p="http://schemas.openxmlformats.org/presentationml/2006/main" xmlns:r="http://schemas.openxmlformats.org/officeDocument/2006/relationships">
+  <p:cSld>
+    <p:bg>
+      <p:bgPr>
+        <a:solidFill>
+          <a:srgbClr val="E6E3DA"/>
+        </a:solidFill>
+        <a:effectLst/>
+      </p:bgPr>
+    </p:bg>
+    <p:spTree>
+      <p:nvGrpSpPr>
+        <p:cNvPr id="1" name=""/>
+        <p:cNvGrpSpPr/>
+        <p:nvPr/>
+      </p:nvGrpSpPr>
+      <p:grpSpPr/>
+      <p:sp>
+        <p:nvSpPr>
+          <p:cNvPr id="2" name="TextBox 1"/>
           <p:cNvSpPr txBox="1"/>
           <p:nvPr/>
         </p:nvSpPr>
         <p:spPr>
           <a:xfrm>
-            <a:off x="804672" y="2048256"/>
-            <a:ext cx="2340864" cy="457200"/>
+            <a:off x="658368" y="475488"/>
+            <a:ext cx="10874959" cy="237744"/>
           </a:xfrm>
           <a:prstGeom prst="rect">
             <a:avLst/>
@@ -6972,27 +7528,27 @@
               </a:lnSpc>
             </a:pPr>
             <a:r>
-              <a:rPr sz="3000" b="1">
-                <a:solidFill>
-                  <a:srgbClr val="1C1B18"/>
-                </a:solidFill>
-                <a:latin typeface="Consolas"/>
-              </a:rPr>
-              <a:t>137</a:t>
-            </a:r>
-          </a:p>
-        </p:txBody>
-      </p:sp>
-      <p:sp>
-        <p:nvSpPr>
-          <p:cNvPr id="8" name="TextBox 7"/>
+              <a:rPr sz="1200" b="0" spc="216">
+                <a:solidFill>
+                  <a:srgbClr val="6E695C"/>
+                </a:solidFill>
+                <a:latin typeface="Arial Narrow"/>
+              </a:rPr>
+              <a:t>WHERE IT STANDS</a:t>
+            </a:r>
+          </a:p>
+        </p:txBody>
+      </p:sp>
+      <p:sp>
+        <p:nvSpPr>
+          <p:cNvPr id="3" name="TextBox 2"/>
           <p:cNvSpPr txBox="1"/>
           <p:nvPr/>
         </p:nvSpPr>
         <p:spPr>
           <a:xfrm>
-            <a:off x="804672" y="2551176"/>
-            <a:ext cx="2340864" cy="256032"/>
+            <a:off x="658368" y="749808"/>
+            <a:ext cx="10874959" cy="640080"/>
           </a:xfrm>
           <a:prstGeom prst="rect">
             <a:avLst/>
@@ -7011,38 +7567,36 @@
               </a:lnSpc>
             </a:pPr>
             <a:r>
-              <a:rPr sz="1100" b="0">
-                <a:solidFill>
-                  <a:srgbClr val="4F4B42"/>
+              <a:rPr sz="3400" b="1" spc="68">
+                <a:solidFill>
+                  <a:srgbClr val="1C1B18"/>
                 </a:solidFill>
                 <a:latin typeface="Arial Narrow"/>
               </a:rPr>
-              <a:t>including the live demo stack</a:t>
-            </a:r>
-          </a:p>
-        </p:txBody>
-      </p:sp>
-      <p:sp>
-        <p:nvSpPr>
-          <p:cNvPr id="9" name="Rectangle 8"/>
+              <a:t>Built, measured, and running today.</a:t>
+            </a:r>
+          </a:p>
+        </p:txBody>
+      </p:sp>
+      <p:sp>
+        <p:nvSpPr>
+          <p:cNvPr id="4" name="Rectangle 3"/>
           <p:cNvSpPr/>
           <p:nvPr/>
         </p:nvSpPr>
         <p:spPr>
           <a:xfrm>
-            <a:off x="3456432" y="1682496"/>
-            <a:ext cx="2615184" cy="1170432"/>
+            <a:off x="658368" y="1426464"/>
+            <a:ext cx="10874959" cy="19050"/>
           </a:xfrm>
           <a:prstGeom prst="rect">
             <a:avLst/>
           </a:prstGeom>
           <a:solidFill>
-            <a:srgbClr val="DCD7C9"/>
+            <a:srgbClr val="1C1B18"/>
           </a:solidFill>
-          <a:ln w="9525">
-            <a:solidFill>
-              <a:srgbClr val="1C1B18"/>
-            </a:solidFill>
+          <a:ln>
+            <a:noFill/>
           </a:ln>
           <a:effectLst/>
         </p:spPr>
@@ -7070,13 +7624,59 @@
       </p:sp>
       <p:sp>
         <p:nvSpPr>
-          <p:cNvPr id="10" name="TextBox 9"/>
+          <p:cNvPr id="5" name="Rectangle 4"/>
+          <p:cNvSpPr/>
+          <p:nvPr/>
+        </p:nvSpPr>
+        <p:spPr>
+          <a:xfrm>
+            <a:off x="658368" y="1682496"/>
+            <a:ext cx="2615184" cy="1170432"/>
+          </a:xfrm>
+          <a:prstGeom prst="rect">
+            <a:avLst/>
+          </a:prstGeom>
+          <a:solidFill>
+            <a:srgbClr val="DCD7C9"/>
+          </a:solidFill>
+          <a:ln w="9525">
+            <a:solidFill>
+              <a:srgbClr val="1C1B18"/>
+            </a:solidFill>
+          </a:ln>
+          <a:effectLst/>
+        </p:spPr>
+        <p:style>
+          <a:lnRef idx="1">
+            <a:schemeClr val="accent1"/>
+          </a:lnRef>
+          <a:fillRef idx="3">
+            <a:schemeClr val="accent1"/>
+          </a:fillRef>
+          <a:effectRef idx="2">
+            <a:schemeClr val="accent1"/>
+          </a:effectRef>
+          <a:fontRef idx="minor">
+            <a:schemeClr val="lt1"/>
+          </a:fontRef>
+        </p:style>
+        <p:txBody>
+          <a:bodyPr rtlCol="0" anchor="ctr"/>
+          <a:lstStyle/>
+          <a:p>
+            <a:pPr algn="ctr"/>
+          </a:p>
+        </p:txBody>
+      </p:sp>
+      <p:sp>
+        <p:nvSpPr>
+          <p:cNvPr id="6" name="TextBox 5"/>
           <p:cNvSpPr txBox="1"/>
           <p:nvPr/>
         </p:nvSpPr>
         <p:spPr>
           <a:xfrm>
-            <a:off x="3602736" y="1810512"/>
+            <a:off x="804672" y="1810512"/>
             <a:ext cx="2340864" cy="182880"/>
           </a:xfrm>
           <a:prstGeom prst="rect">
@@ -7102,20 +7702,20 @@
                 </a:solidFill>
                 <a:latin typeface="Arial Narrow"/>
               </a:rPr>
-              <a:t>MACHINES PROVEN ON</a:t>
-            </a:r>
-          </a:p>
-        </p:txBody>
-      </p:sp>
-      <p:sp>
-        <p:nvSpPr>
-          <p:cNvPr id="11" name="TextBox 10"/>
+              <a:t>TESTS PASSING</a:t>
+            </a:r>
+          </a:p>
+        </p:txBody>
+      </p:sp>
+      <p:sp>
+        <p:nvSpPr>
+          <p:cNvPr id="7" name="TextBox 6"/>
           <p:cNvSpPr txBox="1"/>
           <p:nvPr/>
         </p:nvSpPr>
         <p:spPr>
           <a:xfrm>
-            <a:off x="3602736" y="2048256"/>
+            <a:off x="804672" y="2048256"/>
             <a:ext cx="2340864" cy="457200"/>
           </a:xfrm>
           <a:prstGeom prst="rect">
@@ -7137,24 +7737,24 @@
             <a:r>
               <a:rPr sz="3000" b="1">
                 <a:solidFill>
-                  <a:srgbClr val="0E6F52"/>
+                  <a:srgbClr val="1C1B18"/>
                 </a:solidFill>
                 <a:latin typeface="Consolas"/>
               </a:rPr>
-              <a:t>2</a:t>
-            </a:r>
-          </a:p>
-        </p:txBody>
-      </p:sp>
-      <p:sp>
-        <p:nvSpPr>
-          <p:cNvPr id="12" name="TextBox 11"/>
+              <a:t>165</a:t>
+            </a:r>
+          </a:p>
+        </p:txBody>
+      </p:sp>
+      <p:sp>
+        <p:nvSpPr>
+          <p:cNvPr id="8" name="TextBox 7"/>
           <p:cNvSpPr txBox="1"/>
           <p:nvPr/>
         </p:nvSpPr>
         <p:spPr>
           <a:xfrm>
-            <a:off x="3602736" y="2551176"/>
+            <a:off x="804672" y="2551176"/>
             <a:ext cx="2340864" cy="256032"/>
           </a:xfrm>
           <a:prstGeom prst="rect">
@@ -7180,7 +7780,170 @@
                 </a:solidFill>
                 <a:latin typeface="Arial Narrow"/>
               </a:rPr>
-              <a:t>Fedora + macOS, over LAN</a:t>
+              <a:t>including the live demo stack</a:t>
+            </a:r>
+          </a:p>
+        </p:txBody>
+      </p:sp>
+      <p:sp>
+        <p:nvSpPr>
+          <p:cNvPr id="9" name="Rectangle 8"/>
+          <p:cNvSpPr/>
+          <p:nvPr/>
+        </p:nvSpPr>
+        <p:spPr>
+          <a:xfrm>
+            <a:off x="3456432" y="1682496"/>
+            <a:ext cx="2615184" cy="1170432"/>
+          </a:xfrm>
+          <a:prstGeom prst="rect">
+            <a:avLst/>
+          </a:prstGeom>
+          <a:solidFill>
+            <a:srgbClr val="DCD7C9"/>
+          </a:solidFill>
+          <a:ln w="9525">
+            <a:solidFill>
+              <a:srgbClr val="1C1B18"/>
+            </a:solidFill>
+          </a:ln>
+          <a:effectLst/>
+        </p:spPr>
+        <p:style>
+          <a:lnRef idx="1">
+            <a:schemeClr val="accent1"/>
+          </a:lnRef>
+          <a:fillRef idx="3">
+            <a:schemeClr val="accent1"/>
+          </a:fillRef>
+          <a:effectRef idx="2">
+            <a:schemeClr val="accent1"/>
+          </a:effectRef>
+          <a:fontRef idx="minor">
+            <a:schemeClr val="lt1"/>
+          </a:fontRef>
+        </p:style>
+        <p:txBody>
+          <a:bodyPr rtlCol="0" anchor="ctr"/>
+          <a:lstStyle/>
+          <a:p>
+            <a:pPr algn="ctr"/>
+          </a:p>
+        </p:txBody>
+      </p:sp>
+      <p:sp>
+        <p:nvSpPr>
+          <p:cNvPr id="10" name="TextBox 9"/>
+          <p:cNvSpPr txBox="1"/>
+          <p:nvPr/>
+        </p:nvSpPr>
+        <p:spPr>
+          <a:xfrm>
+            <a:off x="3602736" y="1810512"/>
+            <a:ext cx="2340864" cy="182880"/>
+          </a:xfrm>
+          <a:prstGeom prst="rect">
+            <a:avLst/>
+          </a:prstGeom>
+          <a:noFill/>
+        </p:spPr>
+        <p:txBody>
+          <a:bodyPr wrap="square" lIns="0" rIns="0" tIns="0" bIns="0">
+            <a:spAutoFit/>
+          </a:bodyPr>
+          <a:lstStyle/>
+          <a:p>
+            <a:pPr algn="l">
+              <a:lnSpc>
+                <a:spcPct val="125000"/>
+              </a:lnSpc>
+            </a:pPr>
+            <a:r>
+              <a:rPr sz="1050" b="0" spc="147">
+                <a:solidFill>
+                  <a:srgbClr val="6E695C"/>
+                </a:solidFill>
+                <a:latin typeface="Arial Narrow"/>
+              </a:rPr>
+              <a:t>REAL TRACES EVALUATED</a:t>
+            </a:r>
+          </a:p>
+        </p:txBody>
+      </p:sp>
+      <p:sp>
+        <p:nvSpPr>
+          <p:cNvPr id="11" name="TextBox 10"/>
+          <p:cNvSpPr txBox="1"/>
+          <p:nvPr/>
+        </p:nvSpPr>
+        <p:spPr>
+          <a:xfrm>
+            <a:off x="3602736" y="2048256"/>
+            <a:ext cx="2340864" cy="457200"/>
+          </a:xfrm>
+          <a:prstGeom prst="rect">
+            <a:avLst/>
+          </a:prstGeom>
+          <a:noFill/>
+        </p:spPr>
+        <p:txBody>
+          <a:bodyPr wrap="square" lIns="0" rIns="0" tIns="0" bIns="0">
+            <a:spAutoFit/>
+          </a:bodyPr>
+          <a:lstStyle/>
+          <a:p>
+            <a:pPr algn="l">
+              <a:lnSpc>
+                <a:spcPct val="125000"/>
+              </a:lnSpc>
+            </a:pPr>
+            <a:r>
+              <a:rPr sz="3000" b="1">
+                <a:solidFill>
+                  <a:srgbClr val="0E6F52"/>
+                </a:solidFill>
+                <a:latin typeface="Consolas"/>
+              </a:rPr>
+              <a:t>148</a:t>
+            </a:r>
+          </a:p>
+        </p:txBody>
+      </p:sp>
+      <p:sp>
+        <p:nvSpPr>
+          <p:cNvPr id="12" name="TextBox 11"/>
+          <p:cNvSpPr txBox="1"/>
+          <p:nvPr/>
+        </p:nvSpPr>
+        <p:spPr>
+          <a:xfrm>
+            <a:off x="3602736" y="2551176"/>
+            <a:ext cx="2340864" cy="256032"/>
+          </a:xfrm>
+          <a:prstGeom prst="rect">
+            <a:avLst/>
+          </a:prstGeom>
+          <a:noFill/>
+        </p:spPr>
+        <p:txBody>
+          <a:bodyPr wrap="square" lIns="0" rIns="0" tIns="0" bIns="0">
+            <a:spAutoFit/>
+          </a:bodyPr>
+          <a:lstStyle/>
+          <a:p>
+            <a:pPr algn="l">
+              <a:lnSpc>
+                <a:spcPct val="125000"/>
+              </a:lnSpc>
+            </a:pPr>
+            <a:r>
+              <a:rPr sz="1100" b="0">
+                <a:solidFill>
+                  <a:srgbClr val="4F4B42"/>
+                </a:solidFill>
+                <a:latin typeface="Arial Narrow"/>
+              </a:rPr>
+              <a:t>TRAIL, expert-annotated</a:t>
             </a:r>
           </a:p>
         </p:txBody>
